--- a/prezentace/1. ročník/03 - licence, citace, ochranná známka.pptx
+++ b/prezentace/1. ročník/03 - licence, citace, ochranná známka.pptx
@@ -1057,13 +1057,6 @@
             <a:schemeClr val="lt1"/>
           </a:fontRef>
         </p:style>
-        <p:txBody>
-          <a:bodyPr/>
-          <a:lstStyle/>
-          <a:p>
-            <a:endParaRPr lang="cs-CZ"/>
-          </a:p>
-        </p:txBody>
       </p:sp>
       <p:sp>
         <p:nvSpPr>
@@ -1102,13 +1095,6 @@
             <a:schemeClr val="lt1"/>
           </a:fontRef>
         </p:style>
-        <p:txBody>
-          <a:bodyPr/>
-          <a:lstStyle/>
-          <a:p>
-            <a:endParaRPr lang="cs-CZ"/>
-          </a:p>
-        </p:txBody>
       </p:sp>
       <p:sp>
         <p:nvSpPr>
@@ -1241,7 +1227,7 @@
           <a:p>
             <a:fld id="{4BDF68E2-58F2-4D09-BE8B-E3BD06533059}" type="datetimeFigureOut">
               <a:rPr lang="en-US" dirty="0"/>
-              <a:t>10/13/2025</a:t>
+              <a:t>10/12/2025</a:t>
             </a:fld>
             <a:endParaRPr lang="en-US"/>
           </a:p>
@@ -1447,7 +1433,7 @@
           <a:p>
             <a:fld id="{2E2D6473-DF6D-4702-B328-E0DD40540A4E}" type="datetimeFigureOut">
               <a:rPr lang="en-US" dirty="0"/>
-              <a:t>10/13/2025</a:t>
+              <a:t>10/12/2025</a:t>
             </a:fld>
             <a:endParaRPr lang="en-US"/>
           </a:p>
@@ -1701,7 +1687,7 @@
           <a:p>
             <a:fld id="{E26F7E3A-B166-407D-9866-32884E7D5B37}" type="datetimeFigureOut">
               <a:rPr lang="en-US" dirty="0"/>
-              <a:t>10/13/2025</a:t>
+              <a:t>10/12/2025</a:t>
             </a:fld>
             <a:endParaRPr lang="en-US"/>
           </a:p>
@@ -1873,7 +1859,7 @@
           <a:p>
             <a:fld id="{528FC5F6-F338-4AE4-BB23-26385BCFC423}" type="datetimeFigureOut">
               <a:rPr lang="en-US" dirty="0"/>
-              <a:t>10/13/2025</a:t>
+              <a:t>10/12/2025</a:t>
             </a:fld>
             <a:endParaRPr lang="en-US"/>
           </a:p>
@@ -2215,7 +2201,7 @@
           <a:p>
             <a:fld id="{20EBB0C4-6273-4C6E-B9BD-2EDC30F1CD52}" type="datetimeFigureOut">
               <a:rPr lang="en-US" dirty="0"/>
-              <a:t>10/13/2025</a:t>
+              <a:t>10/12/2025</a:t>
             </a:fld>
             <a:endParaRPr lang="en-US"/>
           </a:p>
@@ -2487,7 +2473,7 @@
           <a:p>
             <a:fld id="{19AB4D41-86C1-4908-B66A-0B50CEB3BF29}" type="datetimeFigureOut">
               <a:rPr lang="en-US" dirty="0"/>
-              <a:t>10/13/2025</a:t>
+              <a:t>10/12/2025</a:t>
             </a:fld>
             <a:endParaRPr lang="en-US"/>
           </a:p>
@@ -2863,7 +2849,7 @@
           <a:p>
             <a:fld id="{E6426E2C-56C1-4E0D-A793-0088A7FDD37E}" type="datetimeFigureOut">
               <a:rPr lang="en-US" dirty="0"/>
-              <a:t>10/13/2025</a:t>
+              <a:t>10/12/2025</a:t>
             </a:fld>
             <a:endParaRPr lang="en-US"/>
           </a:p>
@@ -2980,7 +2966,7 @@
           <a:p>
             <a:fld id="{C8C39B41-D8B5-4052-B551-9B5525EAA8B6}" type="datetimeFigureOut">
               <a:rPr lang="en-US" dirty="0"/>
-              <a:t>10/13/2025</a:t>
+              <a:t>10/12/2025</a:t>
             </a:fld>
             <a:endParaRPr lang="en-US"/>
           </a:p>
@@ -3151,7 +3137,7 @@
           <a:p>
             <a:fld id="{4D94136C-8742-45B2-AF27-D93DF72833A9}" type="datetimeFigureOut">
               <a:rPr lang="en-US" dirty="0"/>
-              <a:t>10/13/2025</a:t>
+              <a:t>10/12/2025</a:t>
             </a:fld>
             <a:endParaRPr lang="en-US"/>
           </a:p>
@@ -3504,7 +3490,7 @@
           <a:p>
             <a:fld id="{32ABBEA6-7C60-4B02-AE87-00D78D8422AF}" type="datetimeFigureOut">
               <a:rPr lang="en-US" dirty="0"/>
-              <a:t>10/13/2025</a:t>
+              <a:t>10/12/2025</a:t>
             </a:fld>
             <a:endParaRPr lang="en-US"/>
           </a:p>
@@ -3882,7 +3868,7 @@
           <a:p>
             <a:fld id="{C9CAD897-D46E-4AD2-BD9B-49DD3E640873}" type="datetimeFigureOut">
               <a:rPr lang="en-US" dirty="0"/>
-              <a:t>10/13/2025</a:t>
+              <a:t>10/12/2025</a:t>
             </a:fld>
             <a:endParaRPr lang="en-US"/>
           </a:p>
@@ -4002,13 +3988,6 @@
             <a:schemeClr val="lt1"/>
           </a:fontRef>
         </p:style>
-        <p:txBody>
-          <a:bodyPr/>
-          <a:lstStyle/>
-          <a:p>
-            <a:endParaRPr lang="cs-CZ"/>
-          </a:p>
-        </p:txBody>
       </p:sp>
       <p:sp>
         <p:nvSpPr>
@@ -4047,13 +4026,6 @@
             <a:schemeClr val="lt1"/>
           </a:fontRef>
         </p:style>
-        <p:txBody>
-          <a:bodyPr/>
-          <a:lstStyle/>
-          <a:p>
-            <a:endParaRPr lang="cs-CZ"/>
-          </a:p>
-        </p:txBody>
       </p:sp>
       <p:sp>
         <p:nvSpPr>
@@ -4181,7 +4153,7 @@
           <a:p>
             <a:fld id="{98624D31-43A5-475A-80CF-332C9F6DCF35}" type="datetimeFigureOut">
               <a:rPr lang="en-US" dirty="0"/>
-              <a:t>10/13/2025</a:t>
+              <a:t>10/12/2025</a:t>
             </a:fld>
             <a:endParaRPr lang="en-US"/>
           </a:p>
@@ -5468,13 +5440,6 @@
             <a:schemeClr val="lt1"/>
           </a:fontRef>
         </p:style>
-        <p:txBody>
-          <a:bodyPr/>
-          <a:lstStyle/>
-          <a:p>
-            <a:endParaRPr lang="cs-CZ"/>
-          </a:p>
-        </p:txBody>
       </p:sp>
       <p:sp>
         <p:nvSpPr>
@@ -5530,13 +5495,6 @@
             <a:schemeClr val="lt1"/>
           </a:fontRef>
         </p:style>
-        <p:txBody>
-          <a:bodyPr/>
-          <a:lstStyle/>
-          <a:p>
-            <a:endParaRPr lang="cs-CZ"/>
-          </a:p>
-        </p:txBody>
       </p:sp>
       <p:sp>
         <p:nvSpPr>
@@ -6162,13 +6120,6 @@
             <a:schemeClr val="lt1"/>
           </a:fontRef>
         </p:style>
-        <p:txBody>
-          <a:bodyPr/>
-          <a:lstStyle/>
-          <a:p>
-            <a:endParaRPr lang="cs-CZ"/>
-          </a:p>
-        </p:txBody>
       </p:sp>
       <p:sp>
         <p:nvSpPr>
@@ -6224,13 +6175,6 @@
             <a:schemeClr val="lt1"/>
           </a:fontRef>
         </p:style>
-        <p:txBody>
-          <a:bodyPr/>
-          <a:lstStyle/>
-          <a:p>
-            <a:endParaRPr lang="cs-CZ"/>
-          </a:p>
-        </p:txBody>
       </p:sp>
       <p:graphicFrame>
         <p:nvGraphicFramePr>
@@ -7702,7 +7646,7 @@
         <p:spPr/>
         <p:txBody>
           <a:bodyPr vert="horz" lIns="0" tIns="45720" rIns="0" bIns="45720" rtlCol="0" anchor="t">
-            <a:normAutofit/>
+            <a:normAutofit fontScale="92500" lnSpcReduction="20000"/>
           </a:bodyPr>
           <a:lstStyle/>
           <a:p>
@@ -7874,7 +7818,42 @@
                 <a:ea typeface="+mn-lt"/>
                 <a:cs typeface="+mn-lt"/>
               </a:rPr>
-              <a:t>Rozlišovat mezi přímou a nepřímou citací</a:t>
+              <a:t>Uvádět </a:t>
+            </a:r>
+            <a:r>
+              <a:rPr lang="cs-CZ" b="1" dirty="0">
+                <a:ea typeface="+mn-lt"/>
+                <a:cs typeface="+mn-lt"/>
+              </a:rPr>
+              <a:t>autora, název, rok, vydání, vydavatele, místo vydání, počet stran</a:t>
+            </a:r>
+            <a:endParaRPr lang="cs-CZ" dirty="0"/>
+          </a:p>
+          <a:p>
+            <a:pPr>
+              <a:buFont typeface="Calibri"/>
+              <a:buChar char=" "/>
+            </a:pPr>
+            <a:r>
+              <a:rPr lang="cs-CZ" dirty="0">
+                <a:ea typeface="+mn-lt"/>
+                <a:cs typeface="+mn-lt"/>
+              </a:rPr>
+              <a:t>Přímá citace = uvozovky + odkaz na autora + číslo strany</a:t>
+            </a:r>
+            <a:endParaRPr lang="cs-CZ" dirty="0"/>
+          </a:p>
+          <a:p>
+            <a:pPr>
+              <a:buFont typeface="Calibri"/>
+              <a:buChar char=" "/>
+            </a:pPr>
+            <a:r>
+              <a:rPr lang="cs-CZ" dirty="0">
+                <a:ea typeface="+mn-lt"/>
+                <a:cs typeface="+mn-lt"/>
+              </a:rPr>
+              <a:t>Nepřímá citace = vlastní formulace + odkaz na autora + stránka (pokud je k dispozici)</a:t>
             </a:r>
             <a:endParaRPr lang="cs-CZ" dirty="0"/>
           </a:p>
@@ -8737,13 +8716,6 @@
             <a:schemeClr val="lt1"/>
           </a:fontRef>
         </p:style>
-        <p:txBody>
-          <a:bodyPr/>
-          <a:lstStyle/>
-          <a:p>
-            <a:endParaRPr lang="cs-CZ"/>
-          </a:p>
-        </p:txBody>
       </p:sp>
       <p:sp>
         <p:nvSpPr>
@@ -8799,13 +8771,6 @@
             <a:schemeClr val="lt1"/>
           </a:fontRef>
         </p:style>
-        <p:txBody>
-          <a:bodyPr/>
-          <a:lstStyle/>
-          <a:p>
-            <a:endParaRPr lang="cs-CZ"/>
-          </a:p>
-        </p:txBody>
       </p:sp>
     </p:spTree>
     <p:extLst>
@@ -9104,24 +9069,10 @@
 </file>
 
 <file path=customXml/item1.xml><?xml version="1.0" encoding="utf-8"?>
-<p:properties xmlns:p="http://schemas.microsoft.com/office/2006/metadata/properties" xmlns:xsi="http://www.w3.org/2001/XMLSchema-instance" xmlns:pc="http://schemas.microsoft.com/office/infopath/2007/PartnerControls">
-  <documentManagement/>
-</p:properties>
-</file>
-
-<file path=customXml/item2.xml><?xml version="1.0" encoding="utf-8"?>
-<?mso-contentType ?>
-<FormTemplates xmlns="http://schemas.microsoft.com/sharepoint/v3/contenttype/forms">
-  <Display>DocumentLibraryForm</Display>
-  <Edit>DocumentLibraryForm</Edit>
-  <New>DocumentLibraryForm</New>
-</FormTemplates>
-</file>
-
-<file path=customXml/item3.xml><?xml version="1.0" encoding="utf-8"?>
-<ct:contentTypeSchema xmlns:ct="http://schemas.microsoft.com/office/2006/metadata/contentType" xmlns:ma="http://schemas.microsoft.com/office/2006/metadata/properties/metaAttributes" ct:_="" ma:_="" ma:contentTypeName="Dokument" ma:contentTypeID="0x01010052F7ECDF1E614946A5A39D5552BFC522" ma:contentTypeVersion="3" ma:contentTypeDescription="Vytvoří nový dokument" ma:contentTypeScope="" ma:versionID="5075b04c696d8e4e1044287e15cbfe0d">
-  <xsd:schema xmlns:xsd="http://www.w3.org/2001/XMLSchema" xmlns:xs="http://www.w3.org/2001/XMLSchema" xmlns:p="http://schemas.microsoft.com/office/2006/metadata/properties" xmlns:ns2="09a37b55-a4d7-45bd-a73f-33c2b1d41898" targetNamespace="http://schemas.microsoft.com/office/2006/metadata/properties" ma:root="true" ma:fieldsID="d414fa7318b96dcdb4c31e9e457c351e" ns2:_="">
+<ct:contentTypeSchema xmlns:ct="http://schemas.microsoft.com/office/2006/metadata/contentType" xmlns:ma="http://schemas.microsoft.com/office/2006/metadata/properties/metaAttributes" ct:_="" ma:_="" ma:contentTypeName="Dokument" ma:contentTypeID="0x01010052F7ECDF1E614946A5A39D5552BFC522" ma:contentTypeVersion="9" ma:contentTypeDescription="Vytvoří nový dokument" ma:contentTypeScope="" ma:versionID="360afebd84136be89cf7ed5911c04be8">
+  <xsd:schema xmlns:xsd="http://www.w3.org/2001/XMLSchema" xmlns:xs="http://www.w3.org/2001/XMLSchema" xmlns:p="http://schemas.microsoft.com/office/2006/metadata/properties" xmlns:ns2="09a37b55-a4d7-45bd-a73f-33c2b1d41898" xmlns:ns3="3eb61919-e7f8-4a11-8db4-9145fbd21da9" targetNamespace="http://schemas.microsoft.com/office/2006/metadata/properties" ma:root="true" ma:fieldsID="520b6e59c8e59b4daf6c7654b04c196b" ns2:_="" ns3:_="">
     <xsd:import namespace="09a37b55-a4d7-45bd-a73f-33c2b1d41898"/>
+    <xsd:import namespace="3eb61919-e7f8-4a11-8db4-9145fbd21da9"/>
     <xsd:element name="properties">
       <xsd:complexType>
         <xsd:sequence>
@@ -9131,6 +9082,11 @@
                 <xsd:element ref="ns2:MediaServiceMetadata" minOccurs="0"/>
                 <xsd:element ref="ns2:MediaServiceFastMetadata" minOccurs="0"/>
                 <xsd:element ref="ns2:MediaServiceSearchProperties" minOccurs="0"/>
+                <xsd:element ref="ns2:MediaServiceDateTaken" minOccurs="0"/>
+                <xsd:element ref="ns2:lcf76f155ced4ddcb4097134ff3c332f" minOccurs="0"/>
+                <xsd:element ref="ns3:TaxCatchAll" minOccurs="0"/>
+                <xsd:element ref="ns2:MediaServiceGenerationTime" minOccurs="0"/>
+                <xsd:element ref="ns2:MediaServiceEventHashCode" minOccurs="0"/>
               </xsd:all>
             </xsd:complexType>
           </xsd:element>
@@ -9155,6 +9111,43 @@
       <xsd:simpleType>
         <xsd:restriction base="dms:Note"/>
       </xsd:simpleType>
+    </xsd:element>
+    <xsd:element name="MediaServiceDateTaken" ma:index="11" nillable="true" ma:displayName="MediaServiceDateTaken" ma:hidden="true" ma:indexed="true" ma:internalName="MediaServiceDateTaken" ma:readOnly="true">
+      <xsd:simpleType>
+        <xsd:restriction base="dms:Text"/>
+      </xsd:simpleType>
+    </xsd:element>
+    <xsd:element name="lcf76f155ced4ddcb4097134ff3c332f" ma:index="13" nillable="true" ma:taxonomy="true" ma:internalName="lcf76f155ced4ddcb4097134ff3c332f" ma:taxonomyFieldName="MediaServiceImageTags" ma:displayName="Značky obrázků" ma:readOnly="false" ma:fieldId="{5cf76f15-5ced-4ddc-b409-7134ff3c332f}" ma:taxonomyMulti="true" ma:sspId="ebb97977-59de-4a56-a93a-a55cc960f67b" ma:termSetId="09814cd3-568e-fe90-9814-8d621ff8fb84" ma:anchorId="fba54fb3-c3e1-fe81-a776-ca4b69148c4d" ma:open="true" ma:isKeyword="false">
+      <xsd:complexType>
+        <xsd:sequence>
+          <xsd:element ref="pc:Terms" minOccurs="0" maxOccurs="1"/>
+        </xsd:sequence>
+      </xsd:complexType>
+    </xsd:element>
+    <xsd:element name="MediaServiceGenerationTime" ma:index="15" nillable="true" ma:displayName="MediaServiceGenerationTime" ma:hidden="true" ma:internalName="MediaServiceGenerationTime" ma:readOnly="true">
+      <xsd:simpleType>
+        <xsd:restriction base="dms:Text"/>
+      </xsd:simpleType>
+    </xsd:element>
+    <xsd:element name="MediaServiceEventHashCode" ma:index="16" nillable="true" ma:displayName="MediaServiceEventHashCode" ma:hidden="true" ma:internalName="MediaServiceEventHashCode" ma:readOnly="true">
+      <xsd:simpleType>
+        <xsd:restriction base="dms:Text"/>
+      </xsd:simpleType>
+    </xsd:element>
+  </xsd:schema>
+  <xsd:schema xmlns:xsd="http://www.w3.org/2001/XMLSchema" xmlns:xs="http://www.w3.org/2001/XMLSchema" xmlns:dms="http://schemas.microsoft.com/office/2006/documentManagement/types" xmlns:pc="http://schemas.microsoft.com/office/infopath/2007/PartnerControls" targetNamespace="3eb61919-e7f8-4a11-8db4-9145fbd21da9" elementFormDefault="qualified">
+    <xsd:import namespace="http://schemas.microsoft.com/office/2006/documentManagement/types"/>
+    <xsd:import namespace="http://schemas.microsoft.com/office/infopath/2007/PartnerControls"/>
+    <xsd:element name="TaxCatchAll" ma:index="14" nillable="true" ma:displayName="Taxonomy Catch All Column" ma:hidden="true" ma:list="{b81dadd1-d650-44b3-88bb-a397f6058a88}" ma:internalName="TaxCatchAll" ma:showField="CatchAllData" ma:web="3eb61919-e7f8-4a11-8db4-9145fbd21da9">
+      <xsd:complexType>
+        <xsd:complexContent>
+          <xsd:extension base="dms:MultiChoiceLookup">
+            <xsd:sequence>
+              <xsd:element name="Value" type="dms:Lookup" maxOccurs="unbounded" minOccurs="0" nillable="true"/>
+            </xsd:sequence>
+          </xsd:extension>
+        </xsd:complexContent>
+      </xsd:complexType>
     </xsd:element>
   </xsd:schema>
   <xsd:schema xmlns="http://schemas.openxmlformats.org/package/2006/metadata/core-properties" xmlns:xsd="http://www.w3.org/2001/XMLSchema" xmlns:xsi="http://www.w3.org/2001/XMLSchema-instance" xmlns:dc="http://purl.org/dc/elements/1.1/" xmlns:dcterms="http://purl.org/dc/terms/" xmlns:odoc="http://schemas.microsoft.com/internal/obd" targetNamespace="http://schemas.openxmlformats.org/package/2006/metadata/core-properties" elementFormDefault="qualified" attributeFormDefault="unqualified" blockDefault="#all">
@@ -9256,13 +9249,28 @@
 </ct:contentTypeSchema>
 </file>
 
+<file path=customXml/item2.xml><?xml version="1.0" encoding="utf-8"?>
+<?mso-contentType ?>
+<FormTemplates xmlns="http://schemas.microsoft.com/sharepoint/v3/contenttype/forms">
+  <Display>DocumentLibraryForm</Display>
+  <Edit>DocumentLibraryForm</Edit>
+  <New>DocumentLibraryForm</New>
+</FormTemplates>
+</file>
+
+<file path=customXml/item3.xml><?xml version="1.0" encoding="utf-8"?>
+<p:properties xmlns:p="http://schemas.microsoft.com/office/2006/metadata/properties" xmlns:xsi="http://www.w3.org/2001/XMLSchema-instance" xmlns:pc="http://schemas.microsoft.com/office/infopath/2007/PartnerControls">
+  <documentManagement>
+    <TaxCatchAll xmlns="3eb61919-e7f8-4a11-8db4-9145fbd21da9" xsi:nil="true"/>
+    <lcf76f155ced4ddcb4097134ff3c332f xmlns="09a37b55-a4d7-45bd-a73f-33c2b1d41898">
+      <Terms xmlns="http://schemas.microsoft.com/office/infopath/2007/PartnerControls"/>
+    </lcf76f155ced4ddcb4097134ff3c332f>
+  </documentManagement>
+</p:properties>
+</file>
+
 <file path=customXml/itemProps1.xml><?xml version="1.0" encoding="utf-8"?>
-<ds:datastoreItem xmlns:ds="http://schemas.openxmlformats.org/officeDocument/2006/customXml" ds:itemID="{7CF52871-FF00-4D4A-8396-DA8C6A507140}">
-  <ds:schemaRefs>
-    <ds:schemaRef ds:uri="http://schemas.microsoft.com/office/2006/metadata/properties"/>
-    <ds:schemaRef ds:uri="http://schemas.microsoft.com/office/infopath/2007/PartnerControls"/>
-  </ds:schemaRefs>
-</ds:datastoreItem>
+<ds:datastoreItem xmlns:ds="http://schemas.openxmlformats.org/officeDocument/2006/customXml" ds:itemID="{5C9DCBA5-27A2-40C5-9F9A-CF841CDD3095}"/>
 </file>
 
 <file path=customXml/itemProps2.xml><?xml version="1.0" encoding="utf-8"?>
@@ -9274,19 +9282,10 @@
 </file>
 
 <file path=customXml/itemProps3.xml><?xml version="1.0" encoding="utf-8"?>
-<ds:datastoreItem xmlns:ds="http://schemas.openxmlformats.org/officeDocument/2006/customXml" ds:itemID="{438BD7EA-DB82-4FBE-B85E-AD10D61ABF31}">
+<ds:datastoreItem xmlns:ds="http://schemas.openxmlformats.org/officeDocument/2006/customXml" ds:itemID="{7CF52871-FF00-4D4A-8396-DA8C6A507140}">
   <ds:schemaRefs>
-    <ds:schemaRef ds:uri="09a37b55-a4d7-45bd-a73f-33c2b1d41898"/>
-    <ds:schemaRef ds:uri="http://purl.org/dc/elements/1.1/"/>
-    <ds:schemaRef ds:uri="http://purl.org/dc/terms/"/>
-    <ds:schemaRef ds:uri="http://schemas.microsoft.com/internal/obd"/>
-    <ds:schemaRef ds:uri="http://schemas.microsoft.com/office/2006/documentManagement/types"/>
-    <ds:schemaRef ds:uri="http://schemas.microsoft.com/office/2006/metadata/contentType"/>
     <ds:schemaRef ds:uri="http://schemas.microsoft.com/office/2006/metadata/properties"/>
-    <ds:schemaRef ds:uri="http://schemas.microsoft.com/office/2006/metadata/properties/metaAttributes"/>
     <ds:schemaRef ds:uri="http://schemas.microsoft.com/office/infopath/2007/PartnerControls"/>
-    <ds:schemaRef ds:uri="http://schemas.openxmlformats.org/package/2006/metadata/core-properties"/>
-    <ds:schemaRef ds:uri="http://www.w3.org/2001/XMLSchema"/>
   </ds:schemaRefs>
 </ds:datastoreItem>
 </file>